--- a/lectures/08-Functions/CS1910_Functions_Lecture.pptx
+++ b/lectures/08-Functions/CS1910_Functions_Lecture.pptx
@@ -367,7 +367,7 @@
           <a:p>
             <a:fld id="{1160EA64-D806-43AC-9DF2-F8C432F32B4C}" type="datetimeFigureOut">
               <a:rPr lang="en-US" dirty="0"/>
-              <a:t>7/22/2026</a:t>
+              <a:t>10/21/26</a:t>
             </a:fld>
             <a:endParaRPr lang="en-US" dirty="0"/>
           </a:p>
@@ -533,7 +533,7 @@
           <a:p>
             <a:fld id="{E9F9C37B-1D36-470B-8223-D6C91242EC14}" type="datetimeFigureOut">
               <a:rPr lang="en-US" dirty="0"/>
-              <a:t>7/22/2026</a:t>
+              <a:t>10/21/26</a:t>
             </a:fld>
             <a:endParaRPr lang="en-US" dirty="0"/>
           </a:p>
@@ -708,7 +708,7 @@
           <a:p>
             <a:fld id="{67C6F52A-A82B-47A2-A83A-8C4C91F2D59F}" type="datetimeFigureOut">
               <a:rPr lang="en-US" dirty="0"/>
-              <a:t>7/22/2026</a:t>
+              <a:t>10/21/26</a:t>
             </a:fld>
             <a:endParaRPr lang="en-US" dirty="0"/>
           </a:p>
@@ -873,7 +873,7 @@
           <a:p>
             <a:fld id="{F070A7B3-6521-4DCA-87E5-044747A908C1}" type="datetimeFigureOut">
               <a:rPr lang="en-US" dirty="0"/>
-              <a:t>7/22/2026</a:t>
+              <a:t>10/21/26</a:t>
             </a:fld>
             <a:endParaRPr lang="en-US" dirty="0"/>
           </a:p>
@@ -1137,7 +1137,7 @@
           <a:p>
             <a:fld id="{1160EA64-D806-43AC-9DF2-F8C432F32B4C}" type="datetimeFigureOut">
               <a:rPr lang="en-US" dirty="0"/>
-              <a:t>7/22/2026</a:t>
+              <a:t>10/21/26</a:t>
             </a:fld>
             <a:endParaRPr lang="en-US" dirty="0"/>
           </a:p>
@@ -1365,7 +1365,7 @@
           <a:p>
             <a:fld id="{AB134690-1557-4C89-A502-4959FE7FAD70}" type="datetimeFigureOut">
               <a:rPr lang="en-US" dirty="0"/>
-              <a:t>7/22/2026</a:t>
+              <a:t>10/21/26</a:t>
             </a:fld>
             <a:endParaRPr lang="en-US" dirty="0"/>
           </a:p>
@@ -1719,7 +1719,7 @@
           <a:p>
             <a:fld id="{4F7D4976-E339-4826-83B7-FBD03F55ECF8}" type="datetimeFigureOut">
               <a:rPr lang="en-US" dirty="0"/>
-              <a:t>7/22/2026</a:t>
+              <a:t>10/21/26</a:t>
             </a:fld>
             <a:endParaRPr lang="en-US" dirty="0"/>
           </a:p>
@@ -1855,7 +1855,7 @@
           <a:p>
             <a:fld id="{E1037C31-9E7A-4F99-8774-A0E530DE1A42}" type="datetimeFigureOut">
               <a:rPr lang="en-US" dirty="0"/>
-              <a:t>7/22/2026</a:t>
+              <a:t>10/21/26</a:t>
             </a:fld>
             <a:endParaRPr lang="en-US" dirty="0"/>
           </a:p>
@@ -1945,7 +1945,7 @@
           <a:p>
             <a:fld id="{C278504F-A551-4DE0-9316-4DCD1D8CC752}" type="datetimeFigureOut">
               <a:rPr lang="en-US" dirty="0"/>
-              <a:t>7/22/2026</a:t>
+              <a:t>10/21/26</a:t>
             </a:fld>
             <a:endParaRPr lang="en-US" dirty="0"/>
           </a:p>
@@ -2297,7 +2297,7 @@
           <a:p>
             <a:fld id="{D1BE4249-C0D0-4B06-8692-E8BB871AF643}" type="datetimeFigureOut">
               <a:rPr lang="en-US" dirty="0"/>
-              <a:t>7/22/2026</a:t>
+              <a:t>10/21/26</a:t>
             </a:fld>
             <a:endParaRPr lang="en-US" dirty="0"/>
           </a:p>
@@ -2649,7 +2649,7 @@
           <a:p>
             <a:fld id="{042B0DB6-F5C7-45FB-8CF3-31B45F9C2DAC}" type="datetimeFigureOut">
               <a:rPr lang="en-US" dirty="0"/>
-              <a:t>7/22/2026</a:t>
+              <a:t>10/21/26</a:t>
             </a:fld>
             <a:endParaRPr lang="en-US" dirty="0"/>
           </a:p>
@@ -2886,7 +2886,7 @@
           <a:p>
             <a:fld id="{1160EA64-D806-43AC-9DF2-F8C432F32B4C}" type="datetimeFigureOut">
               <a:rPr lang="en-US" dirty="0"/>
-              <a:t>7/22/2026</a:t>
+              <a:t>10/21/26</a:t>
             </a:fld>
             <a:endParaRPr lang="en-US" dirty="0"/>
           </a:p>
@@ -6055,8 +6055,11 @@
               <a:rPr lang="en-US" dirty="0">
                 <a:hlinkClick r:id="rId2"/>
               </a:rPr>
-              <a:t>https://github.com/cdspower-upei/2026W-CS1910-Students/blob/main/Lectures/L08/L08-Functions-Examples.ipynb</a:t>
-            </a:r>
+              <a:t>https://colab.research.google.com/github/UPEI-CS/CS1910-Students/blob/main/lectures/08-Functions/CS1910_Functions_Workbook.ipynb</a:t>
+            </a:r>
+            <a:endParaRPr lang="en-US" dirty="0"/>
+          </a:p>
+          <a:p>
             <a:endParaRPr lang="en-US" dirty="0"/>
           </a:p>
           <a:p>
